--- a/website/static/2026/verified-dataflow-compilation/loop-header.pptx
+++ b/website/static/2026/verified-dataflow-compilation/loop-header.pptx
@@ -4892,7 +4892,7 @@
           <a:lstStyle/>
           <a:p>
             <a:r>
-              <a:rPr lang="en-US" sz="1050" dirty="0">
+              <a:rPr lang="en-US" sz="1050" b="1" dirty="0">
                 <a:solidFill>
                   <a:srgbClr val="00B0F0"/>
                 </a:solidFill>
@@ -4903,7 +4903,7 @@
               <a:t>LH: </a:t>
             </a:r>
             <a:r>
-              <a:rPr lang="en-US" sz="1050" dirty="0">
+              <a:rPr lang="en-US" sz="1050" b="1" dirty="0">
                 <a:solidFill>
                   <a:srgbClr val="00B0F0"/>
                 </a:solidFill>
@@ -6159,8 +6159,8 @@
         </p:nvSpPr>
         <p:spPr>
           <a:xfrm>
-            <a:off x="2146926" y="130709"/>
-            <a:ext cx="378630" cy="276999"/>
+            <a:off x="2142284" y="130709"/>
+            <a:ext cx="388248" cy="276999"/>
           </a:xfrm>
           <a:prstGeom prst="rect">
             <a:avLst/>
@@ -6174,7 +6174,7 @@
           <a:lstStyle/>
           <a:p>
             <a:r>
-              <a:rPr lang="en-US" sz="1200" dirty="0">
+              <a:rPr lang="en-US" sz="1200" b="1" dirty="0">
                 <a:solidFill>
                   <a:srgbClr val="00B0F0"/>
                 </a:solidFill>
